--- a/dist/초3/수학/분수와소수/초3_수학_분수와소수_02_단위분수와크기비교.pptx
+++ b/dist/초3/수학/분수와소수/초3_수학_분수와소수_02_단위분수와크기비교.pptx
@@ -119,45 +119,45 @@
   <p:extLst>
     <p:ext uri="{521415D9-36F7-43E2-AB2F-B90AF26B5E84}">
       <p14:sectionLst xmlns:p14="http://schemas.microsoft.com/office/powerpoint/2010/main">
-        <p14:section name="도입" id="{4775818e-e647-874b-7cb9-46b95a4145ea}">
+        <p14:section name="도입" id="{35e9ff88-90e7-8583-f9a9-4b91da4ff575}">
           <p14:sldIdLst>
             <p14:sldId id="256"/>
             <p14:sldId id="257"/>
           </p14:sldIdLst>
         </p14:section>
-        <p14:section name="개념" id="{39fa53b2-16f6-bd85-2deb-7c1a9cd29b14}">
+        <p14:section name="개념" id="{bf13ec33-63e9-c815-23a0-7eb0a45d4a42}">
           <p14:sldIdLst>
             <p14:sldId id="258"/>
             <p14:sldId id="259"/>
             <p14:sldId id="261"/>
           </p14:sldIdLst>
         </p14:section>
-        <p14:section name="연습" id="{e700b199-06ab-767b-33b8-c0845596edac}">
+        <p14:section name="연습" id="{333cf3f1-80a4-68be-16a2-935665f3d65d}">
           <p14:sldIdLst>
             <p14:sldId id="260"/>
             <p14:sldId id="262"/>
             <p14:sldId id="263"/>
           </p14:sldIdLst>
         </p14:section>
-        <p14:section name="개념" id="{9cb0c729-db78-8470-3184-f6db695fabab}">
+        <p14:section name="개념" id="{ba9664fe-d0e1-9443-d7b6-1debf3fcce0d}">
           <p14:sldIdLst/>
         </p14:section>
-        <p14:section name="연습" id="{41f977af-b7b9-6a8f-c89e-26a3c96bd28c}">
+        <p14:section name="연습" id="{764ba80d-461b-b732-0fd2-63c2b2d5dec6}">
           <p14:sldIdLst/>
         </p14:section>
-        <p14:section name="확인" id="{f179e1e1-9fbd-6d57-0fc8-af01e5769c9e}">
+        <p14:section name="확인" id="{d0bb083a-13ed-f17f-b573-8e4f3f67e3b4}">
           <p14:sldIdLst>
             <p14:sldId id="264"/>
             <p14:sldId id="265"/>
             <p14:sldId id="266"/>
           </p14:sldIdLst>
         </p14:section>
-        <p14:section name="정리" id="{b5fd23a1-8c69-8919-fff5-7a9e845fd614}">
+        <p14:section name="정리" id="{d33a31db-e289-712a-02a6-8178a2112dc0}">
           <p14:sldIdLst>
             <p14:sldId id="267"/>
           </p14:sldIdLst>
         </p14:section>
-        <p14:section name="보충" id="{91e789d6-23ec-8a95-bf29-b28d97075bae}">
+        <p14:section name="보충" id="{a80b543a-d8be-b754-8684-1953afec884d}">
           <p14:sldIdLst>
             <p14:sldId id="268"/>
           </p14:sldIdLst>
@@ -3463,7 +3463,7 @@
               <a:buNone/>
             </a:pPr>
             <a:r>
-              <a:rPr lang="ko-KR" altLang="en-US" sz="3000" dirty="0">
+              <a:rPr lang="en-US" altLang="ko-KR" sz="3000" dirty="0">
                 <a:solidFill>
                   <a:srgbClr val="1F2937"/>
                 </a:solidFill>
@@ -3541,7 +3541,7 @@
               <a:buNone/>
             </a:pPr>
             <a:r>
-              <a:rPr lang="ko-KR" altLang="en-US" sz="3000" dirty="0">
+              <a:rPr lang="en-US" altLang="ko-KR" sz="3000" dirty="0">
                 <a:solidFill>
                   <a:srgbClr val="1F2937"/>
                 </a:solidFill>
@@ -3619,7 +3619,7 @@
               <a:buNone/>
             </a:pPr>
             <a:r>
-              <a:rPr lang="ko-KR" altLang="en-US" sz="3000" dirty="0">
+              <a:rPr lang="en-US" altLang="ko-KR" sz="3000" dirty="0">
                 <a:solidFill>
                   <a:srgbClr val="1F2937"/>
                 </a:solidFill>
@@ -3822,7 +3822,7 @@
               <a:buNone/>
             </a:pPr>
             <a:r>
-              <a:rPr lang="ko-KR" altLang="en-US" sz="3000" dirty="0">
+              <a:rPr lang="en-US" altLang="ko-KR" sz="3000" dirty="0">
                 <a:solidFill>
                   <a:srgbClr val="1F2937"/>
                 </a:solidFill>
